--- a/resources/Инструкция.pptx
+++ b/resources/Инструкция.pptx
@@ -270,7 +270,7 @@
           <a:p>
             <a:fld id="{A606B882-CED5-4FED-AC5D-DA9652BEB4FC}" type="datetimeFigureOut">
               <a:rPr lang="ru-RU" smtClean="0"/>
-              <a:t>02.06.2026</a:t>
+              <a:t>14.09.2026</a:t>
             </a:fld>
             <a:endParaRPr lang="ru-RU"/>
           </a:p>
@@ -468,7 +468,7 @@
           <a:p>
             <a:fld id="{A606B882-CED5-4FED-AC5D-DA9652BEB4FC}" type="datetimeFigureOut">
               <a:rPr lang="ru-RU" smtClean="0"/>
-              <a:t>02.06.2026</a:t>
+              <a:t>14.09.2026</a:t>
             </a:fld>
             <a:endParaRPr lang="ru-RU"/>
           </a:p>
@@ -676,7 +676,7 @@
           <a:p>
             <a:fld id="{A606B882-CED5-4FED-AC5D-DA9652BEB4FC}" type="datetimeFigureOut">
               <a:rPr lang="ru-RU" smtClean="0"/>
-              <a:t>02.06.2026</a:t>
+              <a:t>14.09.2026</a:t>
             </a:fld>
             <a:endParaRPr lang="ru-RU"/>
           </a:p>
@@ -874,7 +874,7 @@
           <a:p>
             <a:fld id="{A606B882-CED5-4FED-AC5D-DA9652BEB4FC}" type="datetimeFigureOut">
               <a:rPr lang="ru-RU" smtClean="0"/>
-              <a:t>02.06.2026</a:t>
+              <a:t>14.09.2026</a:t>
             </a:fld>
             <a:endParaRPr lang="ru-RU"/>
           </a:p>
@@ -1149,7 +1149,7 @@
           <a:p>
             <a:fld id="{A606B882-CED5-4FED-AC5D-DA9652BEB4FC}" type="datetimeFigureOut">
               <a:rPr lang="ru-RU" smtClean="0"/>
-              <a:t>02.06.2026</a:t>
+              <a:t>14.09.2026</a:t>
             </a:fld>
             <a:endParaRPr lang="ru-RU"/>
           </a:p>
@@ -1414,7 +1414,7 @@
           <a:p>
             <a:fld id="{A606B882-CED5-4FED-AC5D-DA9652BEB4FC}" type="datetimeFigureOut">
               <a:rPr lang="ru-RU" smtClean="0"/>
-              <a:t>02.06.2026</a:t>
+              <a:t>14.09.2026</a:t>
             </a:fld>
             <a:endParaRPr lang="ru-RU"/>
           </a:p>
@@ -1826,7 +1826,7 @@
           <a:p>
             <a:fld id="{A606B882-CED5-4FED-AC5D-DA9652BEB4FC}" type="datetimeFigureOut">
               <a:rPr lang="ru-RU" smtClean="0"/>
-              <a:t>02.06.2026</a:t>
+              <a:t>14.09.2026</a:t>
             </a:fld>
             <a:endParaRPr lang="ru-RU"/>
           </a:p>
@@ -1967,7 +1967,7 @@
           <a:p>
             <a:fld id="{A606B882-CED5-4FED-AC5D-DA9652BEB4FC}" type="datetimeFigureOut">
               <a:rPr lang="ru-RU" smtClean="0"/>
-              <a:t>02.06.2026</a:t>
+              <a:t>14.09.2026</a:t>
             </a:fld>
             <a:endParaRPr lang="ru-RU"/>
           </a:p>
@@ -2080,7 +2080,7 @@
           <a:p>
             <a:fld id="{A606B882-CED5-4FED-AC5D-DA9652BEB4FC}" type="datetimeFigureOut">
               <a:rPr lang="ru-RU" smtClean="0"/>
-              <a:t>02.06.2026</a:t>
+              <a:t>14.09.2026</a:t>
             </a:fld>
             <a:endParaRPr lang="ru-RU"/>
           </a:p>
@@ -2391,7 +2391,7 @@
           <a:p>
             <a:fld id="{A606B882-CED5-4FED-AC5D-DA9652BEB4FC}" type="datetimeFigureOut">
               <a:rPr lang="ru-RU" smtClean="0"/>
-              <a:t>02.06.2026</a:t>
+              <a:t>14.09.2026</a:t>
             </a:fld>
             <a:endParaRPr lang="ru-RU"/>
           </a:p>
@@ -2679,7 +2679,7 @@
           <a:p>
             <a:fld id="{A606B882-CED5-4FED-AC5D-DA9652BEB4FC}" type="datetimeFigureOut">
               <a:rPr lang="ru-RU" smtClean="0"/>
-              <a:t>02.06.2026</a:t>
+              <a:t>14.09.2026</a:t>
             </a:fld>
             <a:endParaRPr lang="ru-RU"/>
           </a:p>
@@ -2920,7 +2920,7 @@
           <a:p>
             <a:fld id="{A606B882-CED5-4FED-AC5D-DA9652BEB4FC}" type="datetimeFigureOut">
               <a:rPr lang="ru-RU" smtClean="0"/>
-              <a:t>02.06.2026</a:t>
+              <a:t>14.09.2026</a:t>
             </a:fld>
             <a:endParaRPr lang="ru-RU"/>
           </a:p>
@@ -3339,10 +3339,10 @@
       </p:grpSpPr>
       <p:pic>
         <p:nvPicPr>
-          <p:cNvPr id="8" name="Рисунок 7">
-            <a:extLst>
-              <a:ext uri="{FF2B5EF4-FFF2-40B4-BE49-F238E27FC236}">
-                <a16:creationId xmlns:a16="http://schemas.microsoft.com/office/drawing/2014/main" id="{0D921264-CBA6-7763-E689-CEEE681BAD01}"/>
+          <p:cNvPr id="12" name="Рисунок 11">
+            <a:extLst>
+              <a:ext uri="{FF2B5EF4-FFF2-40B4-BE49-F238E27FC236}">
+                <a16:creationId xmlns:a16="http://schemas.microsoft.com/office/drawing/2014/main" id="{1877C2EC-14F7-2231-C708-CD5AE0663900}"/>
               </a:ext>
             </a:extLst>
           </p:cNvPr>
@@ -3359,8 +3359,8 @@
         </p:blipFill>
         <p:spPr>
           <a:xfrm>
-            <a:off x="236220" y="90581"/>
-            <a:ext cx="11567160" cy="2517487"/>
+            <a:off x="60960" y="177938"/>
+            <a:ext cx="12192000" cy="2372084"/>
           </a:xfrm>
           <a:prstGeom prst="rect">
             <a:avLst/>
@@ -3480,7 +3480,7 @@
           <a:p>
             <a:r>
               <a:rPr lang="ru-RU" sz="1100" dirty="0"/>
-              <a:t>7. Загрузить из: – при нажатии появится список из которого можно выбрать какой файл вы хотите загрузить. Это может быть спецификация, ранее созданная в этой программе, это может быть спецификация с радиаторами других производителей и наконец </a:t>
+              <a:t>7. Загрузить данные: – при нажатии появится список из которого можно выбрать какой файл вы хотите загрузить. Это может быть спецификация, ранее созданная в этой программе, это может быть спецификация с радиаторами других производителей и наконец </a:t>
             </a:r>
             <a:r>
               <a:rPr lang="en-US" sz="1100" dirty="0"/>
@@ -3511,7 +3511,7 @@
         <p:spPr>
           <a:xfrm>
             <a:off x="326066" y="3024805"/>
-            <a:ext cx="4306894" cy="3647152"/>
+            <a:ext cx="4306894" cy="3816429"/>
           </a:xfrm>
           <a:prstGeom prst="rect">
             <a:avLst/>
@@ -3554,7 +3554,19 @@
             </a:pPr>
             <a:r>
               <a:rPr lang="ru-RU" sz="1100" dirty="0"/>
-              <a:t>Вид подключения (</a:t>
+              <a:t>Вид подключения </a:t>
+            </a:r>
+            <a:r>
+              <a:rPr lang="en-US" sz="1100" b="1" dirty="0"/>
+              <a:t>Classic</a:t>
+            </a:r>
+            <a:r>
+              <a:rPr lang="en-US" sz="1100" dirty="0"/>
+              <a:t> </a:t>
+            </a:r>
+            <a:r>
+              <a:rPr lang="ru-RU" sz="1100" dirty="0"/>
+              <a:t>(</a:t>
             </a:r>
             <a:r>
               <a:rPr lang="ru-RU" sz="1100" dirty="0" err="1"/>
@@ -3571,6 +3583,80 @@
             <a:r>
               <a:rPr lang="ru-RU" sz="1100" dirty="0"/>
               <a:t>-левое, K-боковое)</a:t>
+            </a:r>
+          </a:p>
+          <a:p>
+            <a:pPr marL="171450" indent="-171450">
+              <a:buFont typeface="Arial" panose="020B0604020202020204" pitchFamily="34" charset="0"/>
+              <a:buChar char="•"/>
+            </a:pPr>
+            <a:r>
+              <a:rPr lang="ru-RU" sz="1100" dirty="0"/>
+              <a:t>Вид подключения </a:t>
+            </a:r>
+            <a:r>
+              <a:rPr lang="en-US" sz="1100" b="1" dirty="0">
+                <a:solidFill>
+                  <a:srgbClr val="00B050"/>
+                </a:solidFill>
+              </a:rPr>
+              <a:t>Hygiene </a:t>
+            </a:r>
+            <a:r>
+              <a:rPr lang="ru-RU" sz="1100" dirty="0">
+                <a:solidFill>
+                  <a:srgbClr val="00B050"/>
+                </a:solidFill>
+              </a:rPr>
+              <a:t>(</a:t>
+            </a:r>
+            <a:r>
+              <a:rPr lang="en-US" sz="1100" dirty="0">
+                <a:solidFill>
+                  <a:srgbClr val="00B050"/>
+                </a:solidFill>
+              </a:rPr>
+              <a:t>H</a:t>
+            </a:r>
+            <a:r>
+              <a:rPr lang="ru-RU" sz="1100" dirty="0">
+                <a:solidFill>
+                  <a:srgbClr val="00B050"/>
+                </a:solidFill>
+              </a:rPr>
+              <a:t>V-правое, </a:t>
+            </a:r>
+            <a:r>
+              <a:rPr lang="en-US" sz="1100" dirty="0">
+                <a:solidFill>
+                  <a:srgbClr val="00B050"/>
+                </a:solidFill>
+              </a:rPr>
+              <a:t>H</a:t>
+            </a:r>
+            <a:r>
+              <a:rPr lang="ru-RU" sz="1100" dirty="0">
+                <a:solidFill>
+                  <a:srgbClr val="00B050"/>
+                </a:solidFill>
+              </a:rPr>
+              <a:t>V-левое, </a:t>
+            </a:r>
+            <a:r>
+              <a:rPr lang="en-US" sz="1100" dirty="0">
+                <a:solidFill>
+                  <a:srgbClr val="00B050"/>
+                </a:solidFill>
+              </a:rPr>
+              <a:t>H</a:t>
+            </a:r>
+            <a:r>
+              <a:rPr lang="ru-RU" sz="1100" dirty="0">
+                <a:solidFill>
+                  <a:srgbClr val="00B050"/>
+                </a:solidFill>
+              </a:rPr>
+              <a:t>-боковое)</a:t>
             </a:r>
           </a:p>
           <a:p>
@@ -3696,8 +3782,8 @@
         </p:nvSpPr>
         <p:spPr>
           <a:xfrm>
-            <a:off x="236220" y="760476"/>
-            <a:ext cx="6499860" cy="335280"/>
+            <a:off x="388620" y="760476"/>
+            <a:ext cx="7444740" cy="335280"/>
           </a:xfrm>
           <a:prstGeom prst="rect">
             <a:avLst/>
@@ -3761,7 +3847,7 @@
         </p:nvSpPr>
         <p:spPr>
           <a:xfrm>
-            <a:off x="6765290" y="774763"/>
+            <a:off x="7847330" y="797623"/>
             <a:ext cx="459740" cy="271145"/>
           </a:xfrm>
           <a:prstGeom prst="leftArrowCallout">
@@ -3854,8 +3940,8 @@
         </p:nvSpPr>
         <p:spPr>
           <a:xfrm>
-            <a:off x="530352" y="1305560"/>
-            <a:ext cx="11228832" cy="840232"/>
+            <a:off x="396240" y="1336040"/>
+            <a:ext cx="11795760" cy="840232"/>
           </a:xfrm>
           <a:prstGeom prst="rect">
             <a:avLst/>
@@ -3939,8 +4025,8 @@
         </p:nvSpPr>
         <p:spPr>
           <a:xfrm>
-            <a:off x="2747772" y="2189988"/>
-            <a:ext cx="6845808" cy="335280"/>
+            <a:off x="3947160" y="2319528"/>
+            <a:ext cx="4983480" cy="233172"/>
           </a:xfrm>
           <a:prstGeom prst="rect">
             <a:avLst/>
@@ -4004,7 +4090,7 @@
         </p:nvSpPr>
         <p:spPr>
           <a:xfrm>
-            <a:off x="5955284" y="2536507"/>
+            <a:off x="6221984" y="2597467"/>
             <a:ext cx="347980" cy="489585"/>
           </a:xfrm>
           <a:prstGeom prst="upArrowCallout">
@@ -4088,7 +4174,7 @@
         </p:nvSpPr>
         <p:spPr>
           <a:xfrm>
-            <a:off x="10145078" y="93345"/>
+            <a:off x="10343198" y="0"/>
             <a:ext cx="314325" cy="407670"/>
           </a:xfrm>
           <a:prstGeom prst="downArrowCallout">
@@ -4177,7 +4263,7 @@
         </p:nvSpPr>
         <p:spPr>
           <a:xfrm>
-            <a:off x="4361498" y="93345"/>
+            <a:off x="4529138" y="0"/>
             <a:ext cx="314325" cy="407670"/>
           </a:xfrm>
           <a:prstGeom prst="downArrowCallout">
@@ -4266,7 +4352,7 @@
         </p:nvSpPr>
         <p:spPr>
           <a:xfrm>
-            <a:off x="1633538" y="70485"/>
+            <a:off x="1496378" y="0"/>
             <a:ext cx="314325" cy="407670"/>
           </a:xfrm>
           <a:prstGeom prst="downArrowCallout">
@@ -4355,7 +4441,7 @@
         </p:nvSpPr>
         <p:spPr>
           <a:xfrm>
-            <a:off x="7302818" y="100965"/>
+            <a:off x="7318058" y="0"/>
             <a:ext cx="314325" cy="407670"/>
           </a:xfrm>
           <a:prstGeom prst="downArrowCallout">
@@ -4445,7 +4531,7 @@
         <p:spPr>
           <a:xfrm>
             <a:off x="8730615" y="3363218"/>
-            <a:ext cx="3324225" cy="3308598"/>
+            <a:ext cx="3324225" cy="3477875"/>
           </a:xfrm>
           <a:prstGeom prst="rect">
             <a:avLst/>
@@ -4676,7 +4762,7 @@
                 <a:ea typeface="+mn-ea"/>
                 <a:cs typeface="+mn-cs"/>
               </a:rPr>
-              <a:t>Прайс-лист </a:t>
+              <a:t>Формуляр для регистрации проектов</a:t>
             </a:r>
           </a:p>
           <a:p>
@@ -4712,7 +4798,7 @@
                 <a:ea typeface="+mn-ea"/>
                 <a:cs typeface="+mn-cs"/>
               </a:rPr>
-              <a:t>Формуляр для регистрации проектов</a:t>
+              <a:t>Каталог отопительного оборудования</a:t>
             </a:r>
           </a:p>
           <a:p>
@@ -4748,7 +4834,7 @@
                 <a:ea typeface="+mn-ea"/>
                 <a:cs typeface="+mn-cs"/>
               </a:rPr>
-              <a:t>Каталог отопительного оборудования</a:t>
+              <a:t>Паспорт на радиатор</a:t>
             </a:r>
           </a:p>
           <a:p>
@@ -4784,8 +4870,22 @@
                 <a:ea typeface="+mn-ea"/>
                 <a:cs typeface="+mn-cs"/>
               </a:rPr>
-              <a:t>Паспорт на радиатор</a:t>
-            </a:r>
+              <a:t>Сертификат соответствия</a:t>
+            </a:r>
+            <a:endParaRPr kumimoji="0" lang="en-US" sz="1100" b="0" i="0" u="none" strike="noStrike" kern="1200" cap="none" spc="0" normalizeH="0" baseline="0" noProof="0" dirty="0">
+              <a:ln>
+                <a:noFill/>
+              </a:ln>
+              <a:solidFill>
+                <a:prstClr val="black"/>
+              </a:solidFill>
+              <a:effectLst/>
+              <a:uLnTx/>
+              <a:uFillTx/>
+              <a:latin typeface="Calibri" panose="020F0502020204030204"/>
+              <a:ea typeface="+mn-ea"/>
+              <a:cs typeface="+mn-cs"/>
+            </a:endParaRPr>
           </a:p>
           <a:p>
             <a:pPr marL="171450" marR="0" lvl="0" indent="-171450" algn="l" defTabSz="914400" rtl="0" eaLnBrk="1" fontAlgn="auto" latinLnBrk="0" hangingPunct="1">
@@ -4806,56 +4906,6 @@
               <a:defRPr/>
             </a:pPr>
             <a:r>
-              <a:rPr kumimoji="0" lang="ru-RU" sz="1100" b="0" i="0" u="none" strike="noStrike" kern="1200" cap="none" spc="0" normalizeH="0" baseline="0" noProof="0" dirty="0">
-                <a:ln>
-                  <a:noFill/>
-                </a:ln>
-                <a:solidFill>
-                  <a:prstClr val="black"/>
-                </a:solidFill>
-                <a:effectLst/>
-                <a:uLnTx/>
-                <a:uFillTx/>
-                <a:latin typeface="Calibri" panose="020F0502020204030204"/>
-                <a:ea typeface="+mn-ea"/>
-                <a:cs typeface="+mn-cs"/>
-              </a:rPr>
-              <a:t>Сертификат соответствия</a:t>
-            </a:r>
-            <a:endParaRPr kumimoji="0" lang="en-US" sz="1100" b="0" i="0" u="none" strike="noStrike" kern="1200" cap="none" spc="0" normalizeH="0" baseline="0" noProof="0" dirty="0">
-              <a:ln>
-                <a:noFill/>
-              </a:ln>
-              <a:solidFill>
-                <a:prstClr val="black"/>
-              </a:solidFill>
-              <a:effectLst/>
-              <a:uLnTx/>
-              <a:uFillTx/>
-              <a:latin typeface="Calibri" panose="020F0502020204030204"/>
-              <a:ea typeface="+mn-ea"/>
-              <a:cs typeface="+mn-cs"/>
-            </a:endParaRPr>
-          </a:p>
-          <a:p>
-            <a:pPr marL="171450" marR="0" lvl="0" indent="-171450" algn="l" defTabSz="914400" rtl="0" eaLnBrk="1" fontAlgn="auto" latinLnBrk="0" hangingPunct="1">
-              <a:lnSpc>
-                <a:spcPct val="100000"/>
-              </a:lnSpc>
-              <a:spcBef>
-                <a:spcPts val="0"/>
-              </a:spcBef>
-              <a:spcAft>
-                <a:spcPts val="0"/>
-              </a:spcAft>
-              <a:buClrTx/>
-              <a:buSzTx/>
-              <a:buFont typeface="Arial" panose="020B0604020202020204" pitchFamily="34" charset="0"/>
-              <a:buChar char="•"/>
-              <a:tabLst/>
-              <a:defRPr/>
-            </a:pPr>
-            <a:r>
               <a:rPr lang="en-US" sz="1100" dirty="0">
                 <a:solidFill>
                   <a:prstClr val="black"/>
@@ -5015,7 +5065,7 @@
                 <a:ea typeface="+mn-ea"/>
                 <a:cs typeface="+mn-cs"/>
               </a:rPr>
-              <a:t>10. Посмотреть/отредактировать предложенные  </a:t>
+              <a:t>10. Масштаб, кнопки – и + меняют масштаб интерфейса</a:t>
             </a:r>
           </a:p>
           <a:p>
@@ -5036,15 +5086,31 @@
               <a:tabLst/>
               <a:defRPr/>
             </a:pPr>
-            <a:r>
-              <a:rPr lang="ru-RU" sz="1100" dirty="0">
-                <a:solidFill>
-                  <a:prstClr val="black"/>
-                </a:solidFill>
-                <a:latin typeface="Calibri" panose="020F0502020204030204"/>
-              </a:rPr>
-              <a:t> </a:t>
-            </a:r>
+            <a:endParaRPr lang="ru-RU" sz="1100" dirty="0">
+              <a:solidFill>
+                <a:prstClr val="black"/>
+              </a:solidFill>
+              <a:latin typeface="Calibri" panose="020F0502020204030204"/>
+            </a:endParaRPr>
+          </a:p>
+          <a:p>
+            <a:pPr marL="0" marR="0" lvl="0" indent="0" algn="l" defTabSz="914400" rtl="0" eaLnBrk="1" fontAlgn="auto" latinLnBrk="0" hangingPunct="1">
+              <a:lnSpc>
+                <a:spcPct val="100000"/>
+              </a:lnSpc>
+              <a:spcBef>
+                <a:spcPts val="0"/>
+              </a:spcBef>
+              <a:spcAft>
+                <a:spcPts val="0"/>
+              </a:spcAft>
+              <a:buClrTx/>
+              <a:buSzTx/>
+              <a:buFontTx/>
+              <a:buNone/>
+              <a:tabLst/>
+              <a:defRPr/>
+            </a:pPr>
             <a:r>
               <a:rPr kumimoji="0" lang="ru-RU" sz="1100" b="0" i="0" u="none" strike="noStrike" kern="1200" cap="none" spc="0" normalizeH="0" baseline="0" noProof="0" dirty="0">
                 <a:ln>
@@ -5060,54 +5126,10 @@
                 <a:ea typeface="+mn-ea"/>
                 <a:cs typeface="+mn-cs"/>
               </a:rPr>
-              <a:t>аналоги</a:t>
-            </a:r>
-          </a:p>
-          <a:p>
-            <a:pPr marL="0" marR="0" lvl="0" indent="0" algn="l" defTabSz="914400" rtl="0" eaLnBrk="1" fontAlgn="auto" latinLnBrk="0" hangingPunct="1">
-              <a:lnSpc>
-                <a:spcPct val="100000"/>
-              </a:lnSpc>
-              <a:spcBef>
-                <a:spcPts val="0"/>
-              </a:spcBef>
-              <a:spcAft>
-                <a:spcPts val="0"/>
-              </a:spcAft>
-              <a:buClrTx/>
-              <a:buSzTx/>
-              <a:buFontTx/>
-              <a:buNone/>
-              <a:tabLst/>
-              <a:defRPr/>
-            </a:pPr>
-            <a:endParaRPr lang="ru-RU" sz="1100" dirty="0">
-              <a:solidFill>
-                <a:prstClr val="black"/>
-              </a:solidFill>
-              <a:latin typeface="Calibri" panose="020F0502020204030204"/>
-            </a:endParaRPr>
-          </a:p>
-          <a:p>
-            <a:pPr marL="0" marR="0" lvl="0" indent="0" algn="l" defTabSz="914400" rtl="0" eaLnBrk="1" fontAlgn="auto" latinLnBrk="0" hangingPunct="1">
-              <a:lnSpc>
-                <a:spcPct val="100000"/>
-              </a:lnSpc>
-              <a:spcBef>
-                <a:spcPts val="0"/>
-              </a:spcBef>
-              <a:spcAft>
-                <a:spcPts val="0"/>
-              </a:spcAft>
-              <a:buClrTx/>
-              <a:buSzTx/>
-              <a:buFontTx/>
-              <a:buNone/>
-              <a:tabLst/>
-              <a:defRPr/>
-            </a:pPr>
-            <a:r>
-              <a:rPr kumimoji="0" lang="ru-RU" sz="1100" b="0" i="0" u="none" strike="noStrike" kern="1200" cap="none" spc="0" normalizeH="0" baseline="0" noProof="0" dirty="0">
+              <a:t>Подсказки отображает характеристики и стоимость радиаторов, также показывают рекомендованные кронштейны и </a:t>
+            </a:r>
+            <a:r>
+              <a:rPr kumimoji="0" lang="ru-RU" sz="1100" b="0" i="0" u="none" strike="noStrike" kern="1200" cap="none" spc="0" normalizeH="0" baseline="0" noProof="0" dirty="0" err="1">
                 <a:ln>
                   <a:noFill/>
                 </a:ln>
@@ -5121,8 +5143,31 @@
                 <a:ea typeface="+mn-ea"/>
                 <a:cs typeface="+mn-cs"/>
               </a:rPr>
-              <a:t>Масштаб, кнопки – и + меняют масштаб интерфейса</a:t>
-            </a:r>
+              <a:t>и</a:t>
+            </a:r>
+            <a:r>
+              <a:rPr lang="ru-RU" sz="1100" dirty="0">
+                <a:solidFill>
+                  <a:prstClr val="black"/>
+                </a:solidFill>
+                <a:latin typeface="Calibri" panose="020F0502020204030204"/>
+              </a:rPr>
+              <a:t>х количества</a:t>
+            </a:r>
+            <a:endParaRPr kumimoji="0" lang="ru-RU" sz="1100" b="0" i="0" u="none" strike="noStrike" kern="1200" cap="none" spc="0" normalizeH="0" baseline="0" noProof="0" dirty="0">
+              <a:ln>
+                <a:noFill/>
+              </a:ln>
+              <a:solidFill>
+                <a:prstClr val="black"/>
+              </a:solidFill>
+              <a:effectLst/>
+              <a:uLnTx/>
+              <a:uFillTx/>
+              <a:latin typeface="Calibri" panose="020F0502020204030204"/>
+              <a:ea typeface="+mn-ea"/>
+              <a:cs typeface="+mn-cs"/>
+            </a:endParaRPr>
           </a:p>
         </p:txBody>
       </p:sp>
@@ -5140,7 +5185,7 @@
         </p:nvSpPr>
         <p:spPr>
           <a:xfrm>
-            <a:off x="10414508" y="2480119"/>
+            <a:off x="10742168" y="2563939"/>
             <a:ext cx="347980" cy="489585"/>
           </a:xfrm>
           <a:prstGeom prst="upArrowCallout">
@@ -5224,7 +5269,7 @@
         </p:nvSpPr>
         <p:spPr>
           <a:xfrm>
-            <a:off x="862076" y="2466403"/>
+            <a:off x="602996" y="2580703"/>
             <a:ext cx="347980" cy="417005"/>
           </a:xfrm>
           <a:prstGeom prst="upArrowCallout">
@@ -5308,7 +5353,7 @@
         </p:nvSpPr>
         <p:spPr>
           <a:xfrm>
-            <a:off x="1666748" y="2460307"/>
+            <a:off x="1910588" y="2566987"/>
             <a:ext cx="347980" cy="417005"/>
           </a:xfrm>
           <a:prstGeom prst="upArrowCallout">
@@ -5399,8 +5444,8 @@
         </p:nvSpPr>
         <p:spPr>
           <a:xfrm>
-            <a:off x="10495788" y="757428"/>
-            <a:ext cx="1263396" cy="335280"/>
+            <a:off x="11346180" y="757428"/>
+            <a:ext cx="845820" cy="335280"/>
           </a:xfrm>
           <a:prstGeom prst="rect">
             <a:avLst/>

--- a/resources/Инструкция.pptx
+++ b/resources/Инструкция.pptx
@@ -270,7 +270,7 @@
           <a:p>
             <a:fld id="{A606B882-CED5-4FED-AC5D-DA9652BEB4FC}" type="datetimeFigureOut">
               <a:rPr lang="ru-RU" smtClean="0"/>
-              <a:t>14.09.2026</a:t>
+              <a:t>18.09.2026</a:t>
             </a:fld>
             <a:endParaRPr lang="ru-RU"/>
           </a:p>
@@ -468,7 +468,7 @@
           <a:p>
             <a:fld id="{A606B882-CED5-4FED-AC5D-DA9652BEB4FC}" type="datetimeFigureOut">
               <a:rPr lang="ru-RU" smtClean="0"/>
-              <a:t>14.09.2026</a:t>
+              <a:t>18.09.2026</a:t>
             </a:fld>
             <a:endParaRPr lang="ru-RU"/>
           </a:p>
@@ -676,7 +676,7 @@
           <a:p>
             <a:fld id="{A606B882-CED5-4FED-AC5D-DA9652BEB4FC}" type="datetimeFigureOut">
               <a:rPr lang="ru-RU" smtClean="0"/>
-              <a:t>14.09.2026</a:t>
+              <a:t>18.09.2026</a:t>
             </a:fld>
             <a:endParaRPr lang="ru-RU"/>
           </a:p>
@@ -874,7 +874,7 @@
           <a:p>
             <a:fld id="{A606B882-CED5-4FED-AC5D-DA9652BEB4FC}" type="datetimeFigureOut">
               <a:rPr lang="ru-RU" smtClean="0"/>
-              <a:t>14.09.2026</a:t>
+              <a:t>18.09.2026</a:t>
             </a:fld>
             <a:endParaRPr lang="ru-RU"/>
           </a:p>
@@ -1149,7 +1149,7 @@
           <a:p>
             <a:fld id="{A606B882-CED5-4FED-AC5D-DA9652BEB4FC}" type="datetimeFigureOut">
               <a:rPr lang="ru-RU" smtClean="0"/>
-              <a:t>14.09.2026</a:t>
+              <a:t>18.09.2026</a:t>
             </a:fld>
             <a:endParaRPr lang="ru-RU"/>
           </a:p>
@@ -1414,7 +1414,7 @@
           <a:p>
             <a:fld id="{A606B882-CED5-4FED-AC5D-DA9652BEB4FC}" type="datetimeFigureOut">
               <a:rPr lang="ru-RU" smtClean="0"/>
-              <a:t>14.09.2026</a:t>
+              <a:t>18.09.2026</a:t>
             </a:fld>
             <a:endParaRPr lang="ru-RU"/>
           </a:p>
@@ -1826,7 +1826,7 @@
           <a:p>
             <a:fld id="{A606B882-CED5-4FED-AC5D-DA9652BEB4FC}" type="datetimeFigureOut">
               <a:rPr lang="ru-RU" smtClean="0"/>
-              <a:t>14.09.2026</a:t>
+              <a:t>18.09.2026</a:t>
             </a:fld>
             <a:endParaRPr lang="ru-RU"/>
           </a:p>
@@ -1967,7 +1967,7 @@
           <a:p>
             <a:fld id="{A606B882-CED5-4FED-AC5D-DA9652BEB4FC}" type="datetimeFigureOut">
               <a:rPr lang="ru-RU" smtClean="0"/>
-              <a:t>14.09.2026</a:t>
+              <a:t>18.09.2026</a:t>
             </a:fld>
             <a:endParaRPr lang="ru-RU"/>
           </a:p>
@@ -2080,7 +2080,7 @@
           <a:p>
             <a:fld id="{A606B882-CED5-4FED-AC5D-DA9652BEB4FC}" type="datetimeFigureOut">
               <a:rPr lang="ru-RU" smtClean="0"/>
-              <a:t>14.09.2026</a:t>
+              <a:t>18.09.2026</a:t>
             </a:fld>
             <a:endParaRPr lang="ru-RU"/>
           </a:p>
@@ -2391,7 +2391,7 @@
           <a:p>
             <a:fld id="{A606B882-CED5-4FED-AC5D-DA9652BEB4FC}" type="datetimeFigureOut">
               <a:rPr lang="ru-RU" smtClean="0"/>
-              <a:t>14.09.2026</a:t>
+              <a:t>18.09.2026</a:t>
             </a:fld>
             <a:endParaRPr lang="ru-RU"/>
           </a:p>
@@ -2679,7 +2679,7 @@
           <a:p>
             <a:fld id="{A606B882-CED5-4FED-AC5D-DA9652BEB4FC}" type="datetimeFigureOut">
               <a:rPr lang="ru-RU" smtClean="0"/>
-              <a:t>14.09.2026</a:t>
+              <a:t>18.09.2026</a:t>
             </a:fld>
             <a:endParaRPr lang="ru-RU"/>
           </a:p>
@@ -2920,7 +2920,7 @@
           <a:p>
             <a:fld id="{A606B882-CED5-4FED-AC5D-DA9652BEB4FC}" type="datetimeFigureOut">
               <a:rPr lang="ru-RU" smtClean="0"/>
-              <a:t>14.09.2026</a:t>
+              <a:t>18.09.2026</a:t>
             </a:fld>
             <a:endParaRPr lang="ru-RU"/>
           </a:p>
@@ -3339,10 +3339,10 @@
       </p:grpSpPr>
       <p:pic>
         <p:nvPicPr>
-          <p:cNvPr id="12" name="Рисунок 11">
-            <a:extLst>
-              <a:ext uri="{FF2B5EF4-FFF2-40B4-BE49-F238E27FC236}">
-                <a16:creationId xmlns:a16="http://schemas.microsoft.com/office/drawing/2014/main" id="{1877C2EC-14F7-2231-C708-CD5AE0663900}"/>
+          <p:cNvPr id="7" name="Рисунок 6">
+            <a:extLst>
+              <a:ext uri="{FF2B5EF4-FFF2-40B4-BE49-F238E27FC236}">
+                <a16:creationId xmlns:a16="http://schemas.microsoft.com/office/drawing/2014/main" id="{BFE663E1-9416-5625-76E5-DCB0FFBDE4BC}"/>
               </a:ext>
             </a:extLst>
           </p:cNvPr>
@@ -3359,8 +3359,8 @@
         </p:blipFill>
         <p:spPr>
           <a:xfrm>
-            <a:off x="60960" y="177938"/>
-            <a:ext cx="12192000" cy="2372084"/>
+            <a:off x="60960" y="165145"/>
+            <a:ext cx="12077700" cy="2705760"/>
           </a:xfrm>
           <a:prstGeom prst="rect">
             <a:avLst/>
@@ -3400,7 +3400,7 @@
           <a:p>
             <a:r>
               <a:rPr lang="ru-RU" sz="1100" dirty="0"/>
-              <a:t>4. Формирование спецификации:</a:t>
+              <a:t>5. Формирование спецификации:</a:t>
             </a:r>
           </a:p>
           <a:p>
@@ -3454,7 +3454,7 @@
           <a:p>
             <a:r>
               <a:rPr lang="ru-RU" sz="1100" dirty="0"/>
-              <a:t>5. Сброс – при нажатии обнуляются все значения в заполненных ячейках матрицы радиаторов</a:t>
+              <a:t>6. Сброс – при нажатии обнуляются все значения в заполненных ячейках матрицы радиаторов</a:t>
             </a:r>
           </a:p>
           <a:p>
@@ -3463,7 +3463,7 @@
           <a:p>
             <a:r>
               <a:rPr lang="ru-RU" sz="1100" dirty="0"/>
-              <a:t>6. Сохраните спецификацию в формате (</a:t>
+              <a:t>7. Сохраните спецификацию в формате (</a:t>
             </a:r>
             <a:r>
               <a:rPr lang="ru-RU" sz="1100" dirty="0" err="1"/>
@@ -3480,7 +3480,7 @@
           <a:p>
             <a:r>
               <a:rPr lang="ru-RU" sz="1100" dirty="0"/>
-              <a:t>7. Загрузить данные: – при нажатии появится список из которого можно выбрать какой файл вы хотите загрузить. Это может быть спецификация, ранее созданная в этой программе, это может быть спецификация с радиаторами других производителей и наконец </a:t>
+              <a:t>8. Загрузить данные: – при нажатии появится список из которого можно выбрать какой файл вы хотите загрузить. Это может быть спецификация, ранее созданная в этой программе, это может быть спецификация с радиаторами других производителей и наконец </a:t>
             </a:r>
             <a:r>
               <a:rPr lang="en-US" sz="1100" dirty="0"/>
@@ -3510,7 +3510,7 @@
         </p:nvSpPr>
         <p:spPr>
           <a:xfrm>
-            <a:off x="326066" y="3024805"/>
+            <a:off x="289490" y="2945557"/>
             <a:ext cx="4306894" cy="3816429"/>
           </a:xfrm>
           <a:prstGeom prst="rect">
@@ -3526,13 +3526,7 @@
           <a:p>
             <a:r>
               <a:rPr lang="ru-RU" sz="1100" dirty="0"/>
-              <a:t>ПОРЯДОК РАБОТЫ:</a:t>
-            </a:r>
-          </a:p>
-          <a:p>
-            <a:r>
-              <a:rPr lang="ru-RU" sz="1100" dirty="0"/>
-              <a:t>            </a:t>
+              <a:t>ПОРЯДОК РАБОТЫ:            </a:t>
             </a:r>
           </a:p>
           <a:p>
@@ -3712,17 +3706,31 @@
             </a:r>
           </a:p>
           <a:p>
-            <a:pPr marL="171450" indent="-171450">
-              <a:buFontTx/>
-              <a:buChar char="-"/>
-            </a:pPr>
+            <a:endParaRPr lang="en-US" sz="1100" dirty="0"/>
+          </a:p>
+          <a:p>
+            <a:r>
+              <a:rPr lang="en-US" sz="1100" dirty="0"/>
+              <a:t>3</a:t>
+            </a:r>
+            <a:r>
+              <a:rPr lang="ru-RU" sz="1100" dirty="0"/>
+              <a:t>. Установите температурный график (при необходимости)</a:t>
+            </a:r>
+          </a:p>
+          <a:p>
             <a:endParaRPr lang="ru-RU" sz="1100" dirty="0"/>
           </a:p>
           <a:p>
             <a:r>
+              <a:rPr lang="en-US" sz="1100" dirty="0"/>
+              <a:t>4</a:t>
+            </a:r>
+            <a:r>
               <a:rPr lang="ru-RU" sz="1100" dirty="0"/>
-              <a:t>3. Кронштейны и скидки</a:t>
-            </a:r>
+              <a:t>. Кронштейны и скидки</a:t>
+            </a:r>
+            <a:endParaRPr lang="en-US" sz="1100" dirty="0"/>
           </a:p>
           <a:p>
             <a:r>
@@ -3760,12 +3768,6 @@
               <a:t>без кронштейнов</a:t>
             </a:r>
           </a:p>
-          <a:p>
-            <a:r>
-              <a:rPr lang="ru-RU" sz="1100" dirty="0"/>
-              <a:t>Установите скидки (при необходимости)</a:t>
-            </a:r>
-          </a:p>
         </p:txBody>
       </p:sp>
       <p:sp>
@@ -3782,7 +3784,7 @@
         </p:nvSpPr>
         <p:spPr>
           <a:xfrm>
-            <a:off x="388620" y="760476"/>
+            <a:off x="426720" y="722376"/>
             <a:ext cx="7444740" cy="335280"/>
           </a:xfrm>
           <a:prstGeom prst="rect">
@@ -3847,7 +3849,7 @@
         </p:nvSpPr>
         <p:spPr>
           <a:xfrm>
-            <a:off x="7847330" y="797623"/>
+            <a:off x="7902194" y="748855"/>
             <a:ext cx="459740" cy="271145"/>
           </a:xfrm>
           <a:prstGeom prst="leftArrowCallout">
@@ -3940,8 +3942,8 @@
         </p:nvSpPr>
         <p:spPr>
           <a:xfrm>
-            <a:off x="396240" y="1336040"/>
-            <a:ext cx="11795760" cy="840232"/>
+            <a:off x="359664" y="1336040"/>
+            <a:ext cx="11753088" cy="864616"/>
           </a:xfrm>
           <a:prstGeom prst="rect">
             <a:avLst/>
@@ -4025,7 +4027,7 @@
         </p:nvSpPr>
         <p:spPr>
           <a:xfrm>
-            <a:off x="3947160" y="2319528"/>
+            <a:off x="3861816" y="2630424"/>
             <a:ext cx="4983480" cy="233172"/>
           </a:xfrm>
           <a:prstGeom prst="rect">
@@ -4078,90 +4080,6 @@
       </p:sp>
       <p:sp>
         <p:nvSpPr>
-          <p:cNvPr id="23" name="Выноска: стрелка вверх 22">
-            <a:extLst>
-              <a:ext uri="{FF2B5EF4-FFF2-40B4-BE49-F238E27FC236}">
-                <a16:creationId xmlns:a16="http://schemas.microsoft.com/office/drawing/2014/main" id="{3036CF55-E81B-C7C0-5D30-1E5260C28D63}"/>
-              </a:ext>
-            </a:extLst>
-          </p:cNvPr>
-          <p:cNvSpPr/>
-          <p:nvPr/>
-        </p:nvSpPr>
-        <p:spPr>
-          <a:xfrm>
-            <a:off x="6221984" y="2597467"/>
-            <a:ext cx="347980" cy="489585"/>
-          </a:xfrm>
-          <a:prstGeom prst="upArrowCallout">
-            <a:avLst/>
-          </a:prstGeom>
-          <a:noFill/>
-          <a:ln w="9525" cap="flat" cmpd="sng" algn="ctr">
-            <a:solidFill>
-              <a:srgbClr val="EE0000"/>
-            </a:solidFill>
-            <a:prstDash val="solid"/>
-            <a:round/>
-            <a:headEnd type="none" w="med" len="med"/>
-            <a:tailEnd type="none" w="med" len="med"/>
-          </a:ln>
-          <a:effectLst>
-            <a:outerShdw blurRad="50800" dist="38100" dir="2700000" algn="tl" rotWithShape="0">
-              <a:prstClr val="black">
-                <a:alpha val="40000"/>
-              </a:prstClr>
-            </a:outerShdw>
-          </a:effectLst>
-        </p:spPr>
-        <p:style>
-          <a:lnRef idx="0">
-            <a:scrgbClr r="0" g="0" b="0"/>
-          </a:lnRef>
-          <a:fillRef idx="0">
-            <a:scrgbClr r="0" g="0" b="0"/>
-          </a:fillRef>
-          <a:effectRef idx="0">
-            <a:scrgbClr r="0" g="0" b="0"/>
-          </a:effectRef>
-          <a:fontRef idx="minor">
-            <a:schemeClr val="dk1"/>
-          </a:fontRef>
-        </p:style>
-        <p:txBody>
-          <a:bodyPr rot="0" spcFirstLastPara="0" vert="horz" wrap="square" lIns="91440" tIns="45720" rIns="91440" bIns="45720" numCol="1" spcCol="0" rtlCol="0" fromWordArt="0" anchor="ctr" anchorCtr="0" forceAA="0" compatLnSpc="1">
-            <a:prstTxWarp prst="textNoShape">
-              <a:avLst/>
-            </a:prstTxWarp>
-            <a:noAutofit/>
-          </a:bodyPr>
-          <a:lstStyle/>
-          <a:p>
-            <a:pPr algn="ctr">
-              <a:lnSpc>
-                <a:spcPct val="115000"/>
-              </a:lnSpc>
-              <a:spcAft>
-                <a:spcPts val="800"/>
-              </a:spcAft>
-              <a:buNone/>
-            </a:pPr>
-            <a:r>
-              <a:rPr lang="ru-RU" sz="1200" kern="100" dirty="0">
-                <a:solidFill>
-                  <a:srgbClr val="FF0000"/>
-                </a:solidFill>
-                <a:effectLst/>
-                <a:ea typeface="Calibri" panose="020F0502020204030204" pitchFamily="34" charset="0"/>
-                <a:cs typeface="Times New Roman" panose="02020603050405020304" pitchFamily="18" charset="0"/>
-              </a:rPr>
-              <a:t>3</a:t>
-            </a:r>
-          </a:p>
-        </p:txBody>
-      </p:sp>
-      <p:sp>
-        <p:nvSpPr>
           <p:cNvPr id="26" name="Выноска: стрелка вниз 25">
             <a:extLst>
               <a:ext uri="{FF2B5EF4-FFF2-40B4-BE49-F238E27FC236}">
@@ -4175,7 +4093,7 @@
         <p:spPr>
           <a:xfrm>
             <a:off x="10343198" y="0"/>
-            <a:ext cx="314325" cy="407670"/>
+            <a:ext cx="397954" cy="407670"/>
           </a:xfrm>
           <a:prstGeom prst="downArrowCallout">
             <a:avLst/>
@@ -4228,24 +4146,16 @@
               <a:spcAft>
                 <a:spcPts val="800"/>
               </a:spcAft>
-              <a:buNone/>
             </a:pPr>
             <a:r>
               <a:rPr lang="ru-RU" sz="1200" kern="100" dirty="0">
                 <a:solidFill>
                   <a:srgbClr val="EE0000"/>
                 </a:solidFill>
-                <a:effectLst/>
-                <a:ea typeface="Calibri" panose="020F0502020204030204" pitchFamily="34" charset="0"/>
                 <a:cs typeface="Times New Roman" panose="02020603050405020304" pitchFamily="18" charset="0"/>
               </a:rPr>
-              <a:t>9</a:t>
-            </a:r>
-            <a:endParaRPr lang="ru-RU" sz="1200" kern="100" dirty="0">
-              <a:effectLst/>
-              <a:ea typeface="Calibri" panose="020F0502020204030204" pitchFamily="34" charset="0"/>
-              <a:cs typeface="Times New Roman" panose="02020603050405020304" pitchFamily="18" charset="0"/>
-            </a:endParaRPr>
+              <a:t>10</a:t>
+            </a:r>
           </a:p>
         </p:txBody>
       </p:sp>
@@ -4324,11 +4234,10 @@
                 <a:solidFill>
                   <a:srgbClr val="EE0000"/>
                 </a:solidFill>
-                <a:effectLst/>
                 <a:ea typeface="Calibri" panose="020F0502020204030204" pitchFamily="34" charset="0"/>
                 <a:cs typeface="Times New Roman" panose="02020603050405020304" pitchFamily="18" charset="0"/>
               </a:rPr>
-              <a:t>7</a:t>
+              <a:t>8</a:t>
             </a:r>
             <a:endParaRPr lang="ru-RU" sz="1200" kern="100" dirty="0">
               <a:effectLst/>
@@ -4413,11 +4322,10 @@
                 <a:solidFill>
                   <a:srgbClr val="EE0000"/>
                 </a:solidFill>
-                <a:effectLst/>
                 <a:ea typeface="Calibri" panose="020F0502020204030204" pitchFamily="34" charset="0"/>
                 <a:cs typeface="Times New Roman" panose="02020603050405020304" pitchFamily="18" charset="0"/>
               </a:rPr>
-              <a:t>6</a:t>
+              <a:t>7</a:t>
             </a:r>
             <a:endParaRPr lang="ru-RU" sz="1200" kern="100" dirty="0">
               <a:effectLst/>
@@ -4495,24 +4403,16 @@
               <a:spcAft>
                 <a:spcPts val="800"/>
               </a:spcAft>
-              <a:buNone/>
             </a:pPr>
             <a:r>
               <a:rPr lang="ru-RU" sz="1200" kern="100" dirty="0">
                 <a:solidFill>
                   <a:srgbClr val="EE0000"/>
                 </a:solidFill>
-                <a:effectLst/>
-                <a:ea typeface="Calibri" panose="020F0502020204030204" pitchFamily="34" charset="0"/>
                 <a:cs typeface="Times New Roman" panose="02020603050405020304" pitchFamily="18" charset="0"/>
               </a:rPr>
-              <a:t>8</a:t>
-            </a:r>
-            <a:endParaRPr lang="ru-RU" sz="1200" kern="100" dirty="0">
-              <a:effectLst/>
-              <a:ea typeface="Calibri" panose="020F0502020204030204" pitchFamily="34" charset="0"/>
-              <a:cs typeface="Times New Roman" panose="02020603050405020304" pitchFamily="18" charset="0"/>
-            </a:endParaRPr>
+              <a:t>9</a:t>
+            </a:r>
           </a:p>
         </p:txBody>
       </p:sp>
@@ -4576,7 +4476,7 @@
                 <a:ea typeface="+mn-ea"/>
                 <a:cs typeface="+mn-cs"/>
               </a:rPr>
-              <a:t>8. Информация  – при нажатии появится список из  </a:t>
+              <a:t>9. Информация  – при нажатии появится список из  </a:t>
             </a:r>
             <a:r>
               <a:rPr lang="ru-RU" sz="1100" dirty="0">
@@ -4990,6 +4890,15 @@
               <a:defRPr/>
             </a:pPr>
             <a:r>
+              <a:rPr lang="ru-RU" sz="1100" dirty="0">
+                <a:solidFill>
+                  <a:prstClr val="black"/>
+                </a:solidFill>
+                <a:latin typeface="Calibri" panose="020F0502020204030204"/>
+              </a:rPr>
+              <a:t>10</a:t>
+            </a:r>
+            <a:r>
               <a:rPr kumimoji="0" lang="ru-RU" sz="1100" b="0" i="0" u="none" strike="noStrike" kern="1200" cap="none" spc="0" normalizeH="0" baseline="0" noProof="0" dirty="0">
                 <a:ln>
                   <a:noFill/>
@@ -5004,7 +4913,7 @@
                 <a:ea typeface="+mn-ea"/>
                 <a:cs typeface="+mn-cs"/>
               </a:rPr>
-              <a:t>9. Проверить наличие обновлений, путём сверки версий, ранняя версия имеет меньший номер. </a:t>
+              <a:t>. Проверить наличие обновлений, путём сверки версий, ранняя версия имеет меньший номер. </a:t>
             </a:r>
           </a:p>
           <a:p>
@@ -5065,7 +4974,7 @@
                 <a:ea typeface="+mn-ea"/>
                 <a:cs typeface="+mn-cs"/>
               </a:rPr>
-              <a:t>10. Масштаб, кнопки – и + меняют масштаб интерфейса</a:t>
+              <a:t>11. Масштаб, кнопки – и + меняют масштаб интерфейса</a:t>
             </a:r>
           </a:p>
           <a:p>
@@ -5167,265 +5076,6 @@
               <a:latin typeface="Calibri" panose="020F0502020204030204"/>
               <a:ea typeface="+mn-ea"/>
               <a:cs typeface="+mn-cs"/>
-            </a:endParaRPr>
-          </a:p>
-        </p:txBody>
-      </p:sp>
-      <p:sp>
-        <p:nvSpPr>
-          <p:cNvPr id="4" name="Выноска: стрелка вверх 3">
-            <a:extLst>
-              <a:ext uri="{FF2B5EF4-FFF2-40B4-BE49-F238E27FC236}">
-                <a16:creationId xmlns:a16="http://schemas.microsoft.com/office/drawing/2014/main" id="{81D65F85-C9C5-20D0-F9FF-ECAE0BFA6CCA}"/>
-              </a:ext>
-            </a:extLst>
-          </p:cNvPr>
-          <p:cNvSpPr/>
-          <p:nvPr/>
-        </p:nvSpPr>
-        <p:spPr>
-          <a:xfrm>
-            <a:off x="10742168" y="2563939"/>
-            <a:ext cx="347980" cy="489585"/>
-          </a:xfrm>
-          <a:prstGeom prst="upArrowCallout">
-            <a:avLst/>
-          </a:prstGeom>
-          <a:noFill/>
-          <a:ln w="9525" cap="flat" cmpd="sng" algn="ctr">
-            <a:solidFill>
-              <a:srgbClr val="EE0000"/>
-            </a:solidFill>
-            <a:prstDash val="solid"/>
-            <a:round/>
-            <a:headEnd type="none" w="med" len="med"/>
-            <a:tailEnd type="none" w="med" len="med"/>
-          </a:ln>
-          <a:effectLst>
-            <a:outerShdw blurRad="50800" dist="38100" dir="2700000" algn="tl" rotWithShape="0">
-              <a:prstClr val="black">
-                <a:alpha val="40000"/>
-              </a:prstClr>
-            </a:outerShdw>
-          </a:effectLst>
-        </p:spPr>
-        <p:style>
-          <a:lnRef idx="0">
-            <a:scrgbClr r="0" g="0" b="0"/>
-          </a:lnRef>
-          <a:fillRef idx="0">
-            <a:scrgbClr r="0" g="0" b="0"/>
-          </a:fillRef>
-          <a:effectRef idx="0">
-            <a:scrgbClr r="0" g="0" b="0"/>
-          </a:effectRef>
-          <a:fontRef idx="minor">
-            <a:schemeClr val="dk1"/>
-          </a:fontRef>
-        </p:style>
-        <p:txBody>
-          <a:bodyPr rot="0" spcFirstLastPara="0" vert="horz" wrap="square" lIns="91440" tIns="45720" rIns="91440" bIns="45720" numCol="1" spcCol="0" rtlCol="0" fromWordArt="0" anchor="ctr" anchorCtr="0" forceAA="0" compatLnSpc="1">
-            <a:prstTxWarp prst="textNoShape">
-              <a:avLst/>
-            </a:prstTxWarp>
-            <a:noAutofit/>
-          </a:bodyPr>
-          <a:lstStyle/>
-          <a:p>
-            <a:pPr algn="ctr">
-              <a:lnSpc>
-                <a:spcPct val="115000"/>
-              </a:lnSpc>
-              <a:spcAft>
-                <a:spcPts val="800"/>
-              </a:spcAft>
-              <a:buNone/>
-            </a:pPr>
-            <a:r>
-              <a:rPr lang="ru-RU" sz="1200" kern="100" dirty="0">
-                <a:solidFill>
-                  <a:srgbClr val="FF0000"/>
-                </a:solidFill>
-                <a:effectLst/>
-                <a:ea typeface="Calibri" panose="020F0502020204030204" pitchFamily="34" charset="0"/>
-                <a:cs typeface="Times New Roman" panose="02020603050405020304" pitchFamily="18" charset="0"/>
-              </a:rPr>
-              <a:t>5</a:t>
-            </a:r>
-          </a:p>
-        </p:txBody>
-      </p:sp>
-      <p:sp>
-        <p:nvSpPr>
-          <p:cNvPr id="6" name="Выноска: стрелка вверх 5">
-            <a:extLst>
-              <a:ext uri="{FF2B5EF4-FFF2-40B4-BE49-F238E27FC236}">
-                <a16:creationId xmlns:a16="http://schemas.microsoft.com/office/drawing/2014/main" id="{A71D9F60-F704-517D-ABE9-DB091F9DB9EE}"/>
-              </a:ext>
-            </a:extLst>
-          </p:cNvPr>
-          <p:cNvSpPr/>
-          <p:nvPr/>
-        </p:nvSpPr>
-        <p:spPr>
-          <a:xfrm>
-            <a:off x="602996" y="2580703"/>
-            <a:ext cx="347980" cy="417005"/>
-          </a:xfrm>
-          <a:prstGeom prst="upArrowCallout">
-            <a:avLst/>
-          </a:prstGeom>
-          <a:noFill/>
-          <a:ln w="9525" cap="flat" cmpd="sng" algn="ctr">
-            <a:solidFill>
-              <a:srgbClr val="EE0000"/>
-            </a:solidFill>
-            <a:prstDash val="solid"/>
-            <a:round/>
-            <a:headEnd type="none" w="med" len="med"/>
-            <a:tailEnd type="none" w="med" len="med"/>
-          </a:ln>
-          <a:effectLst>
-            <a:outerShdw blurRad="50800" dist="38100" dir="2700000" algn="tl" rotWithShape="0">
-              <a:prstClr val="black">
-                <a:alpha val="40000"/>
-              </a:prstClr>
-            </a:outerShdw>
-          </a:effectLst>
-        </p:spPr>
-        <p:style>
-          <a:lnRef idx="0">
-            <a:scrgbClr r="0" g="0" b="0"/>
-          </a:lnRef>
-          <a:fillRef idx="0">
-            <a:scrgbClr r="0" g="0" b="0"/>
-          </a:fillRef>
-          <a:effectRef idx="0">
-            <a:scrgbClr r="0" g="0" b="0"/>
-          </a:effectRef>
-          <a:fontRef idx="minor">
-            <a:schemeClr val="dk1"/>
-          </a:fontRef>
-        </p:style>
-        <p:txBody>
-          <a:bodyPr rot="0" spcFirstLastPara="0" vert="horz" wrap="square" lIns="91440" tIns="45720" rIns="91440" bIns="45720" numCol="1" spcCol="0" rtlCol="0" fromWordArt="0" anchor="ctr" anchorCtr="0" forceAA="0" compatLnSpc="1">
-            <a:prstTxWarp prst="textNoShape">
-              <a:avLst/>
-            </a:prstTxWarp>
-            <a:noAutofit/>
-          </a:bodyPr>
-          <a:lstStyle/>
-          <a:p>
-            <a:pPr algn="ctr">
-              <a:lnSpc>
-                <a:spcPct val="115000"/>
-              </a:lnSpc>
-              <a:spcAft>
-                <a:spcPts val="800"/>
-              </a:spcAft>
-              <a:buNone/>
-            </a:pPr>
-            <a:r>
-              <a:rPr lang="ru-RU" sz="1200" kern="100" dirty="0">
-                <a:solidFill>
-                  <a:srgbClr val="FF0000"/>
-                </a:solidFill>
-                <a:effectLst/>
-                <a:ea typeface="Calibri" panose="020F0502020204030204" pitchFamily="34" charset="0"/>
-                <a:cs typeface="Times New Roman" panose="02020603050405020304" pitchFamily="18" charset="0"/>
-              </a:rPr>
-              <a:t>4</a:t>
-            </a:r>
-          </a:p>
-        </p:txBody>
-      </p:sp>
-      <p:sp>
-        <p:nvSpPr>
-          <p:cNvPr id="9" name="Выноска: стрелка вверх 8">
-            <a:extLst>
-              <a:ext uri="{FF2B5EF4-FFF2-40B4-BE49-F238E27FC236}">
-                <a16:creationId xmlns:a16="http://schemas.microsoft.com/office/drawing/2014/main" id="{A79B324A-74DC-589D-C00D-3D3E2691B2F7}"/>
-              </a:ext>
-            </a:extLst>
-          </p:cNvPr>
-          <p:cNvSpPr/>
-          <p:nvPr/>
-        </p:nvSpPr>
-        <p:spPr>
-          <a:xfrm>
-            <a:off x="1910588" y="2566987"/>
-            <a:ext cx="347980" cy="417005"/>
-          </a:xfrm>
-          <a:prstGeom prst="upArrowCallout">
-            <a:avLst/>
-          </a:prstGeom>
-          <a:noFill/>
-          <a:ln w="9525" cap="flat" cmpd="sng" algn="ctr">
-            <a:solidFill>
-              <a:srgbClr val="EE0000"/>
-            </a:solidFill>
-            <a:prstDash val="solid"/>
-            <a:round/>
-            <a:headEnd type="none" w="med" len="med"/>
-            <a:tailEnd type="none" w="med" len="med"/>
-          </a:ln>
-          <a:effectLst>
-            <a:outerShdw blurRad="50800" dist="38100" dir="2700000" algn="tl" rotWithShape="0">
-              <a:prstClr val="black">
-                <a:alpha val="40000"/>
-              </a:prstClr>
-            </a:outerShdw>
-          </a:effectLst>
-        </p:spPr>
-        <p:style>
-          <a:lnRef idx="0">
-            <a:scrgbClr r="0" g="0" b="0"/>
-          </a:lnRef>
-          <a:fillRef idx="0">
-            <a:scrgbClr r="0" g="0" b="0"/>
-          </a:fillRef>
-          <a:effectRef idx="0">
-            <a:scrgbClr r="0" g="0" b="0"/>
-          </a:effectRef>
-          <a:fontRef idx="minor">
-            <a:schemeClr val="dk1"/>
-          </a:fontRef>
-        </p:style>
-        <p:txBody>
-          <a:bodyPr rot="0" spcFirstLastPara="0" vert="horz" wrap="square" lIns="91440" tIns="45720" rIns="91440" bIns="45720" numCol="1" spcCol="0" rtlCol="0" fromWordArt="0" anchor="ctr" anchorCtr="0" forceAA="0" compatLnSpc="1">
-            <a:prstTxWarp prst="textNoShape">
-              <a:avLst/>
-            </a:prstTxWarp>
-            <a:noAutofit/>
-          </a:bodyPr>
-          <a:lstStyle/>
-          <a:p>
-            <a:pPr algn="ctr">
-              <a:lnSpc>
-                <a:spcPct val="115000"/>
-              </a:lnSpc>
-              <a:spcAft>
-                <a:spcPts val="800"/>
-              </a:spcAft>
-              <a:buNone/>
-            </a:pPr>
-            <a:r>
-              <a:rPr lang="en-US" sz="1200" kern="100" dirty="0">
-                <a:solidFill>
-                  <a:srgbClr val="FF0000"/>
-                </a:solidFill>
-                <a:ea typeface="Calibri" panose="020F0502020204030204" pitchFamily="34" charset="0"/>
-                <a:cs typeface="Times New Roman" panose="02020603050405020304" pitchFamily="18" charset="0"/>
-              </a:rPr>
-              <a:t>10</a:t>
-            </a:r>
-            <a:endParaRPr lang="ru-RU" sz="1200" kern="100" dirty="0">
-              <a:solidFill>
-                <a:srgbClr val="FF0000"/>
-              </a:solidFill>
-              <a:effectLst/>
-              <a:ea typeface="Calibri" panose="020F0502020204030204" pitchFamily="34" charset="0"/>
-              <a:cs typeface="Times New Roman" panose="02020603050405020304" pitchFamily="18" charset="0"/>
             </a:endParaRPr>
           </a:p>
         </p:txBody>
@@ -5492,6 +5142,524 @@
           <a:lstStyle/>
           <a:p>
             <a:endParaRPr lang="ru-RU"/>
+          </a:p>
+        </p:txBody>
+      </p:sp>
+      <p:sp>
+        <p:nvSpPr>
+          <p:cNvPr id="8" name="Выноска: стрелка влево 7">
+            <a:extLst>
+              <a:ext uri="{FF2B5EF4-FFF2-40B4-BE49-F238E27FC236}">
+                <a16:creationId xmlns:a16="http://schemas.microsoft.com/office/drawing/2014/main" id="{A6213F26-9F95-3661-A494-764A1139F82F}"/>
+              </a:ext>
+            </a:extLst>
+          </p:cNvPr>
+          <p:cNvSpPr/>
+          <p:nvPr/>
+        </p:nvSpPr>
+        <p:spPr>
+          <a:xfrm>
+            <a:off x="8883650" y="2595943"/>
+            <a:ext cx="459740" cy="271145"/>
+          </a:xfrm>
+          <a:prstGeom prst="leftArrowCallout">
+            <a:avLst>
+              <a:gd name="adj1" fmla="val 25000"/>
+              <a:gd name="adj2" fmla="val 25000"/>
+              <a:gd name="adj3" fmla="val 25000"/>
+              <a:gd name="adj4" fmla="val 57244"/>
+            </a:avLst>
+          </a:prstGeom>
+          <a:noFill/>
+          <a:ln w="9525" cap="flat" cmpd="sng" algn="ctr">
+            <a:solidFill>
+              <a:srgbClr val="EE0000"/>
+            </a:solidFill>
+            <a:prstDash val="solid"/>
+            <a:round/>
+            <a:headEnd type="none" w="med" len="med"/>
+            <a:tailEnd type="none" w="med" len="med"/>
+          </a:ln>
+          <a:effectLst>
+            <a:outerShdw blurRad="50800" dist="38100" dir="2700000" algn="tl" rotWithShape="0">
+              <a:prstClr val="black">
+                <a:alpha val="40000"/>
+              </a:prstClr>
+            </a:outerShdw>
+          </a:effectLst>
+        </p:spPr>
+        <p:style>
+          <a:lnRef idx="0">
+            <a:scrgbClr r="0" g="0" b="0"/>
+          </a:lnRef>
+          <a:fillRef idx="0">
+            <a:scrgbClr r="0" g="0" b="0"/>
+          </a:fillRef>
+          <a:effectRef idx="0">
+            <a:scrgbClr r="0" g="0" b="0"/>
+          </a:effectRef>
+          <a:fontRef idx="minor">
+            <a:schemeClr val="dk1"/>
+          </a:fontRef>
+        </p:style>
+        <p:txBody>
+          <a:bodyPr rot="0" spcFirstLastPara="0" vert="horz" wrap="square" lIns="91440" tIns="45720" rIns="91440" bIns="45720" numCol="1" spcCol="0" rtlCol="0" fromWordArt="0" anchor="ctr" anchorCtr="0" forceAA="0" compatLnSpc="1">
+            <a:prstTxWarp prst="textNoShape">
+              <a:avLst/>
+            </a:prstTxWarp>
+            <a:noAutofit/>
+          </a:bodyPr>
+          <a:lstStyle/>
+          <a:p>
+            <a:pPr algn="ctr">
+              <a:lnSpc>
+                <a:spcPct val="115000"/>
+              </a:lnSpc>
+              <a:spcAft>
+                <a:spcPts val="800"/>
+              </a:spcAft>
+            </a:pPr>
+            <a:r>
+              <a:rPr lang="en-US" sz="1200" kern="100" dirty="0">
+                <a:solidFill>
+                  <a:srgbClr val="EE0000"/>
+                </a:solidFill>
+                <a:cs typeface="Times New Roman" panose="02020603050405020304" pitchFamily="18" charset="0"/>
+              </a:rPr>
+              <a:t>4</a:t>
+            </a:r>
+            <a:endParaRPr lang="ru-RU" sz="1200" kern="100" dirty="0">
+              <a:solidFill>
+                <a:srgbClr val="EE0000"/>
+              </a:solidFill>
+              <a:cs typeface="Times New Roman" panose="02020603050405020304" pitchFamily="18" charset="0"/>
+            </a:endParaRPr>
+          </a:p>
+        </p:txBody>
+      </p:sp>
+      <p:sp>
+        <p:nvSpPr>
+          <p:cNvPr id="11" name="Выноска: стрелка влево 10">
+            <a:extLst>
+              <a:ext uri="{FF2B5EF4-FFF2-40B4-BE49-F238E27FC236}">
+                <a16:creationId xmlns:a16="http://schemas.microsoft.com/office/drawing/2014/main" id="{5FA39797-1B4B-2709-0579-BF2DA1E7BDDB}"/>
+              </a:ext>
+            </a:extLst>
+          </p:cNvPr>
+          <p:cNvSpPr/>
+          <p:nvPr/>
+        </p:nvSpPr>
+        <p:spPr>
+          <a:xfrm>
+            <a:off x="2403602" y="2602039"/>
+            <a:ext cx="607822" cy="271145"/>
+          </a:xfrm>
+          <a:prstGeom prst="leftArrowCallout">
+            <a:avLst>
+              <a:gd name="adj1" fmla="val 25000"/>
+              <a:gd name="adj2" fmla="val 25000"/>
+              <a:gd name="adj3" fmla="val 25000"/>
+              <a:gd name="adj4" fmla="val 57244"/>
+            </a:avLst>
+          </a:prstGeom>
+          <a:noFill/>
+          <a:ln w="9525" cap="flat" cmpd="sng" algn="ctr">
+            <a:solidFill>
+              <a:srgbClr val="EE0000"/>
+            </a:solidFill>
+            <a:prstDash val="solid"/>
+            <a:round/>
+            <a:headEnd type="none" w="med" len="med"/>
+            <a:tailEnd type="none" w="med" len="med"/>
+          </a:ln>
+          <a:effectLst>
+            <a:outerShdw blurRad="50800" dist="38100" dir="2700000" algn="tl" rotWithShape="0">
+              <a:prstClr val="black">
+                <a:alpha val="40000"/>
+              </a:prstClr>
+            </a:outerShdw>
+          </a:effectLst>
+        </p:spPr>
+        <p:style>
+          <a:lnRef idx="0">
+            <a:scrgbClr r="0" g="0" b="0"/>
+          </a:lnRef>
+          <a:fillRef idx="0">
+            <a:scrgbClr r="0" g="0" b="0"/>
+          </a:fillRef>
+          <a:effectRef idx="0">
+            <a:scrgbClr r="0" g="0" b="0"/>
+          </a:effectRef>
+          <a:fontRef idx="minor">
+            <a:schemeClr val="dk1"/>
+          </a:fontRef>
+        </p:style>
+        <p:txBody>
+          <a:bodyPr rot="0" spcFirstLastPara="0" vert="horz" wrap="square" lIns="91440" tIns="45720" rIns="91440" bIns="45720" numCol="1" spcCol="0" rtlCol="0" fromWordArt="0" anchor="ctr" anchorCtr="0" forceAA="0" compatLnSpc="1">
+            <a:prstTxWarp prst="textNoShape">
+              <a:avLst/>
+            </a:prstTxWarp>
+            <a:noAutofit/>
+          </a:bodyPr>
+          <a:lstStyle/>
+          <a:p>
+            <a:pPr algn="ctr">
+              <a:lnSpc>
+                <a:spcPct val="115000"/>
+              </a:lnSpc>
+              <a:spcAft>
+                <a:spcPts val="800"/>
+              </a:spcAft>
+              <a:buNone/>
+            </a:pPr>
+            <a:r>
+              <a:rPr lang="ru-RU" sz="1200" kern="100" dirty="0">
+                <a:solidFill>
+                  <a:srgbClr val="EE0000"/>
+                </a:solidFill>
+                <a:ea typeface="Calibri" panose="020F0502020204030204" pitchFamily="34" charset="0"/>
+                <a:cs typeface="Times New Roman" panose="02020603050405020304" pitchFamily="18" charset="0"/>
+              </a:rPr>
+              <a:t>11</a:t>
+            </a:r>
+            <a:endParaRPr lang="ru-RU" sz="1200" kern="100" dirty="0">
+              <a:effectLst/>
+              <a:ea typeface="Calibri" panose="020F0502020204030204" pitchFamily="34" charset="0"/>
+              <a:cs typeface="Times New Roman" panose="02020603050405020304" pitchFamily="18" charset="0"/>
+            </a:endParaRPr>
+          </a:p>
+        </p:txBody>
+      </p:sp>
+      <p:sp>
+        <p:nvSpPr>
+          <p:cNvPr id="15" name="Выноска: стрелка вправо 14">
+            <a:extLst>
+              <a:ext uri="{FF2B5EF4-FFF2-40B4-BE49-F238E27FC236}">
+                <a16:creationId xmlns:a16="http://schemas.microsoft.com/office/drawing/2014/main" id="{411D02A5-50D3-4272-06A1-67B2F266AA2B}"/>
+              </a:ext>
+            </a:extLst>
+          </p:cNvPr>
+          <p:cNvSpPr/>
+          <p:nvPr/>
+        </p:nvSpPr>
+        <p:spPr>
+          <a:xfrm>
+            <a:off x="60960" y="2602992"/>
+            <a:ext cx="335280" cy="213360"/>
+          </a:xfrm>
+          <a:prstGeom prst="rightArrowCallout">
+            <a:avLst/>
+          </a:prstGeom>
+          <a:noFill/>
+          <a:ln w="9525" cap="flat" cmpd="sng" algn="ctr">
+            <a:solidFill>
+              <a:srgbClr val="EE0000"/>
+            </a:solidFill>
+            <a:prstDash val="solid"/>
+            <a:round/>
+            <a:headEnd type="none" w="med" len="med"/>
+            <a:tailEnd type="none" w="med" len="med"/>
+          </a:ln>
+          <a:effectLst>
+            <a:outerShdw blurRad="50800" dist="38100" dir="2700000" algn="tl" rotWithShape="0">
+              <a:prstClr val="black">
+                <a:alpha val="40000"/>
+              </a:prstClr>
+            </a:outerShdw>
+          </a:effectLst>
+        </p:spPr>
+        <p:style>
+          <a:lnRef idx="0">
+            <a:scrgbClr r="0" g="0" b="0"/>
+          </a:lnRef>
+          <a:fillRef idx="0">
+            <a:scrgbClr r="0" g="0" b="0"/>
+          </a:fillRef>
+          <a:effectRef idx="0">
+            <a:scrgbClr r="0" g="0" b="0"/>
+          </a:effectRef>
+          <a:fontRef idx="minor">
+            <a:schemeClr val="dk1"/>
+          </a:fontRef>
+        </p:style>
+        <p:txBody>
+          <a:bodyPr rot="0" spcFirstLastPara="0" vert="horz" wrap="square" lIns="91440" tIns="45720" rIns="91440" bIns="45720" numCol="1" spcCol="0" rtlCol="0" fromWordArt="0" anchor="ctr" anchorCtr="0" forceAA="0" compatLnSpc="1">
+            <a:prstTxWarp prst="textNoShape">
+              <a:avLst/>
+            </a:prstTxWarp>
+            <a:noAutofit/>
+          </a:bodyPr>
+          <a:lstStyle/>
+          <a:p>
+            <a:pPr algn="ctr">
+              <a:lnSpc>
+                <a:spcPct val="115000"/>
+              </a:lnSpc>
+              <a:spcAft>
+                <a:spcPts val="800"/>
+              </a:spcAft>
+            </a:pPr>
+            <a:r>
+              <a:rPr lang="en-US" sz="1200" kern="100" dirty="0">
+                <a:solidFill>
+                  <a:srgbClr val="EE0000"/>
+                </a:solidFill>
+                <a:cs typeface="Times New Roman" panose="02020603050405020304" pitchFamily="18" charset="0"/>
+              </a:rPr>
+              <a:t>5</a:t>
+            </a:r>
+            <a:endParaRPr lang="ru-RU" sz="1200" kern="100" dirty="0">
+              <a:solidFill>
+                <a:srgbClr val="EE0000"/>
+              </a:solidFill>
+              <a:cs typeface="Times New Roman" panose="02020603050405020304" pitchFamily="18" charset="0"/>
+            </a:endParaRPr>
+          </a:p>
+        </p:txBody>
+      </p:sp>
+      <p:sp>
+        <p:nvSpPr>
+          <p:cNvPr id="17" name="Прямоугольник 16">
+            <a:extLst>
+              <a:ext uri="{FF2B5EF4-FFF2-40B4-BE49-F238E27FC236}">
+                <a16:creationId xmlns:a16="http://schemas.microsoft.com/office/drawing/2014/main" id="{9046CCE2-4440-EA8D-4CBC-0291522FC93E}"/>
+              </a:ext>
+            </a:extLst>
+          </p:cNvPr>
+          <p:cNvSpPr/>
+          <p:nvPr/>
+        </p:nvSpPr>
+        <p:spPr>
+          <a:xfrm>
+            <a:off x="85344" y="2301240"/>
+            <a:ext cx="5023104" cy="233172"/>
+          </a:xfrm>
+          <a:prstGeom prst="rect">
+            <a:avLst/>
+          </a:prstGeom>
+          <a:noFill/>
+          <a:ln w="19050" cap="flat" cmpd="sng" algn="ctr">
+            <a:solidFill>
+              <a:srgbClr val="EE0000"/>
+            </a:solidFill>
+            <a:prstDash val="solid"/>
+            <a:round/>
+            <a:headEnd type="none" w="med" len="med"/>
+            <a:tailEnd type="none" w="med" len="med"/>
+          </a:ln>
+          <a:effectLst>
+            <a:outerShdw blurRad="50800" dist="38100" dir="2700000" algn="tl" rotWithShape="0">
+              <a:prstClr val="black">
+                <a:alpha val="40000"/>
+              </a:prstClr>
+            </a:outerShdw>
+          </a:effectLst>
+        </p:spPr>
+        <p:style>
+          <a:lnRef idx="0">
+            <a:scrgbClr r="0" g="0" b="0"/>
+          </a:lnRef>
+          <a:fillRef idx="0">
+            <a:scrgbClr r="0" g="0" b="0"/>
+          </a:fillRef>
+          <a:effectRef idx="0">
+            <a:scrgbClr r="0" g="0" b="0"/>
+          </a:effectRef>
+          <a:fontRef idx="minor">
+            <a:schemeClr val="dk1"/>
+          </a:fontRef>
+        </p:style>
+        <p:txBody>
+          <a:bodyPr rot="0" spcFirstLastPara="0" vert="horz" wrap="square" lIns="91440" tIns="45720" rIns="91440" bIns="45720" numCol="1" spcCol="0" rtlCol="0" fromWordArt="0" anchor="ctr" anchorCtr="0" forceAA="0" compatLnSpc="1">
+            <a:prstTxWarp prst="textNoShape">
+              <a:avLst/>
+            </a:prstTxWarp>
+            <a:noAutofit/>
+          </a:bodyPr>
+          <a:lstStyle/>
+          <a:p>
+            <a:endParaRPr lang="ru-RU"/>
+          </a:p>
+        </p:txBody>
+      </p:sp>
+      <p:sp>
+        <p:nvSpPr>
+          <p:cNvPr id="24" name="Выноска: стрелка влево 23">
+            <a:extLst>
+              <a:ext uri="{FF2B5EF4-FFF2-40B4-BE49-F238E27FC236}">
+                <a16:creationId xmlns:a16="http://schemas.microsoft.com/office/drawing/2014/main" id="{B61E5A2C-B834-838C-F440-52DBC2558A61}"/>
+              </a:ext>
+            </a:extLst>
+          </p:cNvPr>
+          <p:cNvSpPr/>
+          <p:nvPr/>
+        </p:nvSpPr>
+        <p:spPr>
+          <a:xfrm>
+            <a:off x="5122418" y="2278951"/>
+            <a:ext cx="459740" cy="271145"/>
+          </a:xfrm>
+          <a:prstGeom prst="leftArrowCallout">
+            <a:avLst>
+              <a:gd name="adj1" fmla="val 25000"/>
+              <a:gd name="adj2" fmla="val 25000"/>
+              <a:gd name="adj3" fmla="val 25000"/>
+              <a:gd name="adj4" fmla="val 57244"/>
+            </a:avLst>
+          </a:prstGeom>
+          <a:noFill/>
+          <a:ln w="9525" cap="flat" cmpd="sng" algn="ctr">
+            <a:solidFill>
+              <a:srgbClr val="EE0000"/>
+            </a:solidFill>
+            <a:prstDash val="solid"/>
+            <a:round/>
+            <a:headEnd type="none" w="med" len="med"/>
+            <a:tailEnd type="none" w="med" len="med"/>
+          </a:ln>
+          <a:effectLst>
+            <a:outerShdw blurRad="50800" dist="38100" dir="2700000" algn="tl" rotWithShape="0">
+              <a:prstClr val="black">
+                <a:alpha val="40000"/>
+              </a:prstClr>
+            </a:outerShdw>
+          </a:effectLst>
+        </p:spPr>
+        <p:style>
+          <a:lnRef idx="0">
+            <a:scrgbClr r="0" g="0" b="0"/>
+          </a:lnRef>
+          <a:fillRef idx="0">
+            <a:scrgbClr r="0" g="0" b="0"/>
+          </a:fillRef>
+          <a:effectRef idx="0">
+            <a:scrgbClr r="0" g="0" b="0"/>
+          </a:effectRef>
+          <a:fontRef idx="minor">
+            <a:schemeClr val="dk1"/>
+          </a:fontRef>
+        </p:style>
+        <p:txBody>
+          <a:bodyPr rot="0" spcFirstLastPara="0" vert="horz" wrap="square" lIns="91440" tIns="45720" rIns="91440" bIns="45720" numCol="1" spcCol="0" rtlCol="0" fromWordArt="0" anchor="ctr" anchorCtr="0" forceAA="0" compatLnSpc="1">
+            <a:prstTxWarp prst="textNoShape">
+              <a:avLst/>
+            </a:prstTxWarp>
+            <a:noAutofit/>
+          </a:bodyPr>
+          <a:lstStyle/>
+          <a:p>
+            <a:pPr algn="ctr">
+              <a:lnSpc>
+                <a:spcPct val="115000"/>
+              </a:lnSpc>
+              <a:spcAft>
+                <a:spcPts val="800"/>
+              </a:spcAft>
+              <a:buNone/>
+            </a:pPr>
+            <a:r>
+              <a:rPr lang="en-US" sz="1200" kern="100" dirty="0">
+                <a:solidFill>
+                  <a:srgbClr val="EE0000"/>
+                </a:solidFill>
+                <a:effectLst/>
+                <a:ea typeface="Calibri" panose="020F0502020204030204" pitchFamily="34" charset="0"/>
+                <a:cs typeface="Times New Roman" panose="02020603050405020304" pitchFamily="18" charset="0"/>
+              </a:rPr>
+              <a:t>3</a:t>
+            </a:r>
+            <a:endParaRPr lang="ru-RU" sz="1200" kern="100" dirty="0">
+              <a:effectLst/>
+              <a:ea typeface="Calibri" panose="020F0502020204030204" pitchFamily="34" charset="0"/>
+              <a:cs typeface="Times New Roman" panose="02020603050405020304" pitchFamily="18" charset="0"/>
+            </a:endParaRPr>
+          </a:p>
+        </p:txBody>
+      </p:sp>
+      <p:sp>
+        <p:nvSpPr>
+          <p:cNvPr id="25" name="Выноска: стрелка вправо 24">
+            <a:extLst>
+              <a:ext uri="{FF2B5EF4-FFF2-40B4-BE49-F238E27FC236}">
+                <a16:creationId xmlns:a16="http://schemas.microsoft.com/office/drawing/2014/main" id="{4E72A958-539F-1AF8-3F3D-44A8D71C6B46}"/>
+              </a:ext>
+            </a:extLst>
+          </p:cNvPr>
+          <p:cNvSpPr/>
+          <p:nvPr/>
+        </p:nvSpPr>
+        <p:spPr>
+          <a:xfrm>
+            <a:off x="10052304" y="2633472"/>
+            <a:ext cx="396240" cy="213360"/>
+          </a:xfrm>
+          <a:prstGeom prst="rightArrowCallout">
+            <a:avLst/>
+          </a:prstGeom>
+          <a:noFill/>
+          <a:ln w="9525" cap="flat" cmpd="sng" algn="ctr">
+            <a:solidFill>
+              <a:srgbClr val="EE0000"/>
+            </a:solidFill>
+            <a:prstDash val="solid"/>
+            <a:round/>
+            <a:headEnd type="none" w="med" len="med"/>
+            <a:tailEnd type="none" w="med" len="med"/>
+          </a:ln>
+          <a:effectLst>
+            <a:outerShdw blurRad="50800" dist="38100" dir="2700000" algn="tl" rotWithShape="0">
+              <a:prstClr val="black">
+                <a:alpha val="40000"/>
+              </a:prstClr>
+            </a:outerShdw>
+          </a:effectLst>
+        </p:spPr>
+        <p:style>
+          <a:lnRef idx="0">
+            <a:scrgbClr r="0" g="0" b="0"/>
+          </a:lnRef>
+          <a:fillRef idx="0">
+            <a:scrgbClr r="0" g="0" b="0"/>
+          </a:fillRef>
+          <a:effectRef idx="0">
+            <a:scrgbClr r="0" g="0" b="0"/>
+          </a:effectRef>
+          <a:fontRef idx="minor">
+            <a:schemeClr val="dk1"/>
+          </a:fontRef>
+        </p:style>
+        <p:txBody>
+          <a:bodyPr rot="0" spcFirstLastPara="0" vert="horz" wrap="square" lIns="91440" tIns="45720" rIns="91440" bIns="45720" numCol="1" spcCol="0" rtlCol="0" fromWordArt="0" anchor="ctr" anchorCtr="0" forceAA="0" compatLnSpc="1">
+            <a:prstTxWarp prst="textNoShape">
+              <a:avLst/>
+            </a:prstTxWarp>
+            <a:noAutofit/>
+          </a:bodyPr>
+          <a:lstStyle/>
+          <a:p>
+            <a:pPr algn="ctr">
+              <a:lnSpc>
+                <a:spcPct val="115000"/>
+              </a:lnSpc>
+              <a:spcAft>
+                <a:spcPts val="800"/>
+              </a:spcAft>
+            </a:pPr>
+            <a:r>
+              <a:rPr lang="en-US" sz="1200" kern="100" dirty="0">
+                <a:solidFill>
+                  <a:srgbClr val="EE0000"/>
+                </a:solidFill>
+                <a:cs typeface="Times New Roman" panose="02020603050405020304" pitchFamily="18" charset="0"/>
+              </a:rPr>
+              <a:t>6</a:t>
+            </a:r>
+            <a:endParaRPr lang="ru-RU" sz="1200" kern="100" dirty="0">
+              <a:solidFill>
+                <a:srgbClr val="EE0000"/>
+              </a:solidFill>
+              <a:cs typeface="Times New Roman" panose="02020603050405020304" pitchFamily="18" charset="0"/>
+            </a:endParaRPr>
           </a:p>
         </p:txBody>
       </p:sp>
